--- a/Documents/GIT.pptx
+++ b/Documents/GIT.pptx
@@ -13261,7 +13261,7 @@
           <p:nvPr>
             <p:extLst>
               <p:ext uri="{D42A27DB-BD31-4B8C-83A1-F6EECF244321}">
-                <p14:modId xmlns:p14="http://schemas.microsoft.com/office/powerpoint/2010/main" val="1500006277"/>
+                <p14:modId xmlns:p14="http://schemas.microsoft.com/office/powerpoint/2010/main" val="1256906592"/>
               </p:ext>
             </p:extLst>
           </p:nvPr>
@@ -13338,7 +13338,7 @@
                     <a:p>
                       <a:r>
                         <a:rPr lang="en-IN" dirty="0"/>
-                        <a:t>Trisha Srinivas</a:t>
+                        <a:t> Trisha Srinivas</a:t>
                       </a:r>
                     </a:p>
                     <a:p>
@@ -13354,7 +13354,7 @@
                     <a:p>
                       <a:r>
                         <a:rPr lang="en-IN" dirty="0"/>
-                        <a:t>Team Lead</a:t>
+                        <a:t> Team Lead</a:t>
                       </a:r>
                     </a:p>
                   </a:txBody>
@@ -13377,7 +13377,7 @@
                     <a:p>
                       <a:r>
                         <a:rPr lang="en-IN" dirty="0"/>
-                        <a:t>Vanitha B</a:t>
+                        <a:t> Vanitha B</a:t>
                       </a:r>
                     </a:p>
                     <a:p>
@@ -13417,7 +13417,7 @@
                           <a:cs typeface="+mn-cs"/>
                           <a:sym typeface="Arial"/>
                         </a:rPr>
-                        <a:t>Developer </a:t>
+                        <a:t>   Developer </a:t>
                       </a:r>
                     </a:p>
                   </a:txBody>
@@ -13440,7 +13440,7 @@
                     <a:p>
                       <a:r>
                         <a:rPr lang="en-IN" dirty="0"/>
-                        <a:t>Thanushree S</a:t>
+                        <a:t> Thanushree S</a:t>
                       </a:r>
                     </a:p>
                     <a:p>
@@ -13480,7 +13480,7 @@
                           <a:cs typeface="+mn-cs"/>
                           <a:sym typeface="Arial"/>
                         </a:rPr>
-                        <a:t>Marketing Lead</a:t>
+                        <a:t>   Marketing Lead</a:t>
                       </a:r>
                     </a:p>
                   </a:txBody>
@@ -13501,7 +13501,7 @@
                       <a:pPr algn="l"/>
                       <a:r>
                         <a:rPr lang="en-IN" dirty="0"/>
-                        <a:t>Uma Maheshwari</a:t>
+                        <a:t> Uma Maheshwari</a:t>
                       </a:r>
                     </a:p>
                   </a:txBody>
@@ -13538,7 +13538,7 @@
                           <a:cs typeface="+mn-cs"/>
                           <a:sym typeface="Arial"/>
                         </a:rPr>
-                        <a:t>  Development Lead</a:t>
+                        <a:t>   Development Lead</a:t>
                       </a:r>
                     </a:p>
                   </a:txBody>
@@ -13558,7 +13558,7 @@
                     <a:p>
                       <a:r>
                         <a:rPr lang="en-IN" dirty="0"/>
-                        <a:t>Usha Rani</a:t>
+                        <a:t> Usha Rani</a:t>
                       </a:r>
                     </a:p>
                   </a:txBody>
@@ -13595,7 +13595,7 @@
                           <a:cs typeface="+mn-cs"/>
                           <a:sym typeface="Arial"/>
                         </a:rPr>
-                        <a:t>Test Lead</a:t>
+                        <a:t> Test Lead</a:t>
                       </a:r>
                     </a:p>
                   </a:txBody>
@@ -13614,9 +13614,10 @@
                     <a:lstStyle/>
                     <a:p>
                       <a:r>
-                        <a:rPr lang="en-IN" dirty="0"/>
-                        <a:t>Susmitha </a:t>
+                        <a:rPr lang="en-IN"/>
+                        <a:t> Susmitha </a:t>
                       </a:r>
+                      <a:endParaRPr lang="en-IN" dirty="0"/>
                     </a:p>
                   </a:txBody>
                   <a:tcPr anchor="ctr"/>
@@ -13655,7 +13656,7 @@
                           <a:cs typeface="+mn-cs"/>
                           <a:sym typeface="Arial"/>
                         </a:rPr>
-                        <a:t>Customer Contact Lead</a:t>
+                        <a:t> Customer Contact Lead</a:t>
                       </a:r>
                     </a:p>
                     <a:p>
